--- a/m1/diapositivos/sessao-05-m1-f06.pptx
+++ b/m1/diapositivos/sessao-05-m1-f06.pptx
@@ -3976,7 +3976,35 @@
                 <a:ea typeface="Arial" pitchFamily="34" charset="-122"/>
                 <a:cs typeface="Arial" pitchFamily="34" charset="-120"/>
               </a:rPr>
-              <a:t>Fernão Lopes, Crónica de D. João I (edição de 1897), prólogo (grafia atualizada).</a:t>
+              <a:t>Fernão Lopes, </a:t>
+            </a:r>
+            <a:pPr indent="0" marL="0">
+              <a:buNone/>
+            </a:pPr>
+            <a:r>
+              <a:rPr lang="en-US" sz="1200" i="1" dirty="0">
+                <a:solidFill>
+                  <a:srgbClr val="A9A79F"/>
+                </a:solidFill>
+                <a:latin typeface="Arial" pitchFamily="34" charset="0"/>
+                <a:ea typeface="Arial" pitchFamily="34" charset="-122"/>
+                <a:cs typeface="Arial" pitchFamily="34" charset="-120"/>
+              </a:rPr>
+              <a:t>Crónica de D. João I</a:t>
+            </a:r>
+            <a:pPr indent="0" marL="0">
+              <a:buNone/>
+            </a:pPr>
+            <a:r>
+              <a:rPr lang="en-US" sz="1200" dirty="0">
+                <a:solidFill>
+                  <a:srgbClr val="A9A79F"/>
+                </a:solidFill>
+                <a:latin typeface="Arial" pitchFamily="34" charset="0"/>
+                <a:ea typeface="Arial" pitchFamily="34" charset="-122"/>
+                <a:cs typeface="Arial" pitchFamily="34" charset="-120"/>
+              </a:rPr>
+              <a:t> (edição de 1897), prólogo (grafia atualizada).</a:t>
             </a:r>
             <a:endParaRPr lang="en-US" sz="1200" dirty="0"/>
           </a:p>
@@ -4296,7 +4324,35 @@
                 <a:ea typeface="Arial" pitchFamily="34" charset="-122"/>
                 <a:cs typeface="Arial" pitchFamily="34" charset="-120"/>
               </a:rPr>
-              <a:t>Fernão Lopes, Crónica de D. João I (edição de 1897), cap. XII.</a:t>
+              <a:t>Fernão Lopes, </a:t>
+            </a:r>
+            <a:pPr indent="0" marL="0">
+              <a:buNone/>
+            </a:pPr>
+            <a:r>
+              <a:rPr lang="en-US" sz="1200" i="1" dirty="0">
+                <a:solidFill>
+                  <a:srgbClr val="A9A79F"/>
+                </a:solidFill>
+                <a:latin typeface="Arial" pitchFamily="34" charset="0"/>
+                <a:ea typeface="Arial" pitchFamily="34" charset="-122"/>
+                <a:cs typeface="Arial" pitchFamily="34" charset="-120"/>
+              </a:rPr>
+              <a:t>Crónica de D. João I</a:t>
+            </a:r>
+            <a:pPr indent="0" marL="0">
+              <a:buNone/>
+            </a:pPr>
+            <a:r>
+              <a:rPr lang="en-US" sz="1200" dirty="0">
+                <a:solidFill>
+                  <a:srgbClr val="A9A79F"/>
+                </a:solidFill>
+                <a:latin typeface="Arial" pitchFamily="34" charset="0"/>
+                <a:ea typeface="Arial" pitchFamily="34" charset="-122"/>
+                <a:cs typeface="Arial" pitchFamily="34" charset="-120"/>
+              </a:rPr>
+              <a:t> (edição de 1897), cap. XII.</a:t>
             </a:r>
             <a:endParaRPr lang="en-US" sz="1200" dirty="0"/>
           </a:p>
@@ -4636,7 +4692,35 @@
                 <a:ea typeface="Arial" pitchFamily="34" charset="-122"/>
                 <a:cs typeface="Arial" pitchFamily="34" charset="-120"/>
               </a:rPr>
-              <a:t>Fernão Lopes, Crónica de D. João I (edição de 1897), cap. XII.</a:t>
+              <a:t>Fernão Lopes, </a:t>
+            </a:r>
+            <a:pPr indent="0" marL="0">
+              <a:buNone/>
+            </a:pPr>
+            <a:r>
+              <a:rPr lang="en-US" sz="1200" i="1" dirty="0">
+                <a:solidFill>
+                  <a:srgbClr val="A9A79F"/>
+                </a:solidFill>
+                <a:latin typeface="Arial" pitchFamily="34" charset="0"/>
+                <a:ea typeface="Arial" pitchFamily="34" charset="-122"/>
+                <a:cs typeface="Arial" pitchFamily="34" charset="-120"/>
+              </a:rPr>
+              <a:t>Crónica de D. João I</a:t>
+            </a:r>
+            <a:pPr indent="0" marL="0">
+              <a:buNone/>
+            </a:pPr>
+            <a:r>
+              <a:rPr lang="en-US" sz="1200" dirty="0">
+                <a:solidFill>
+                  <a:srgbClr val="A9A79F"/>
+                </a:solidFill>
+                <a:latin typeface="Arial" pitchFamily="34" charset="0"/>
+                <a:ea typeface="Arial" pitchFamily="34" charset="-122"/>
+                <a:cs typeface="Arial" pitchFamily="34" charset="-120"/>
+              </a:rPr>
+              <a:t> (edição de 1897), cap. XII.</a:t>
             </a:r>
             <a:endParaRPr lang="en-US" sz="1200" dirty="0"/>
           </a:p>
@@ -6180,13 +6264,10 @@
               <a:lnSpc>
                 <a:spcPct val="120000"/>
               </a:lnSpc>
-              <a:spcAft>
-                <a:spcPts val="1000"/>
-              </a:spcAft>
-              <a:buNone/>
-            </a:pPr>
-            <a:r>
-              <a:rPr lang="en-US" sz="2000" dirty="0">
+              <a:buNone/>
+            </a:pPr>
+            <a:r>
+              <a:rPr lang="en-US" sz="2000" b="1" dirty="0">
                 <a:solidFill>
                   <a:srgbClr val="F2F0EA"/>
                 </a:solidFill>
@@ -6194,18 +6275,12 @@
                 <a:ea typeface="Georgia" pitchFamily="34" charset="-122"/>
                 <a:cs typeface="Georgia" pitchFamily="34" charset="-120"/>
               </a:rPr>
-              <a:t>Fernão Lopes (c. 1380/1390 – c. 1460) foi guarda-mor da Torre do Tombo. D. Duarte encarregou-o de pôr em crónica as histórias dos reis. No prólogo da Crónica de D. João I promete escrever «verdade sem outra mistura», comparando documentos. Herculano chamou-lhe «pai da história portuguesa».</a:t>
-            </a:r>
-            <a:endParaRPr lang="en-US" sz="2000" dirty="0"/>
-          </a:p>
-          <a:p>
+              <a:t>Fernão Lopes</a:t>
+            </a:r>
             <a:pPr indent="0" marL="0">
               <a:lnSpc>
                 <a:spcPct val="120000"/>
               </a:lnSpc>
-              <a:spcAft>
-                <a:spcPts val="1000"/>
-              </a:spcAft>
               <a:buNone/>
             </a:pPr>
             <a:r>
@@ -6217,7 +6292,75 @@
                 <a:ea typeface="Georgia" pitchFamily="34" charset="-122"/>
                 <a:cs typeface="Georgia" pitchFamily="34" charset="-120"/>
               </a:rPr>
-              <a:t>O que vinha antes: D. Fernando morrera sem herdeiro varão. A 6 de dezembro de 1383, o Mestre de Avis matou o conde João Fernandes Andeiro nos paços da rainha. Estava combinado que o pajem do Mestre gritaria pela cidade que o matavam.</a:t>
+              <a:t> (c. 1380/1390 – c. 1460) foi guarda-mor da Torre do Tombo. D. Duarte encarregou-o de pôr em crónica as histórias dos reis. No prólogo da </a:t>
+            </a:r>
+            <a:pPr indent="0" marL="0">
+              <a:lnSpc>
+                <a:spcPct val="120000"/>
+              </a:lnSpc>
+              <a:buNone/>
+            </a:pPr>
+            <a:r>
+              <a:rPr lang="en-US" sz="2000" i="1" dirty="0">
+                <a:solidFill>
+                  <a:srgbClr val="F2F0EA"/>
+                </a:solidFill>
+                <a:latin typeface="Georgia" pitchFamily="34" charset="0"/>
+                <a:ea typeface="Georgia" pitchFamily="34" charset="-122"/>
+                <a:cs typeface="Georgia" pitchFamily="34" charset="-120"/>
+              </a:rPr>
+              <a:t>Crónica de D. João I</a:t>
+            </a:r>
+            <a:pPr indent="0" marL="0">
+              <a:lnSpc>
+                <a:spcPct val="120000"/>
+              </a:lnSpc>
+              <a:buNone/>
+            </a:pPr>
+            <a:r>
+              <a:rPr lang="en-US" sz="2000" dirty="0">
+                <a:solidFill>
+                  <a:srgbClr val="F2F0EA"/>
+                </a:solidFill>
+                <a:latin typeface="Georgia" pitchFamily="34" charset="0"/>
+                <a:ea typeface="Georgia" pitchFamily="34" charset="-122"/>
+                <a:cs typeface="Georgia" pitchFamily="34" charset="-120"/>
+              </a:rPr>
+              <a:t> promete escrever «verdade sem outra mistura», comparando documentos. Herculano chamou-lhe «pai da história portuguesa». </a:t>
+            </a:r>
+            <a:pPr indent="0" marL="0">
+              <a:lnSpc>
+                <a:spcPct val="120000"/>
+              </a:lnSpc>
+              <a:buNone/>
+            </a:pPr>
+            <a:r>
+              <a:rPr lang="en-US" sz="2000" b="1" dirty="0">
+                <a:solidFill>
+                  <a:srgbClr val="F2F0EA"/>
+                </a:solidFill>
+                <a:latin typeface="Georgia" pitchFamily="34" charset="0"/>
+                <a:ea typeface="Georgia" pitchFamily="34" charset="-122"/>
+                <a:cs typeface="Georgia" pitchFamily="34" charset="-120"/>
+              </a:rPr>
+              <a:t>O que vinha antes:</a:t>
+            </a:r>
+            <a:pPr indent="0" marL="0">
+              <a:lnSpc>
+                <a:spcPct val="120000"/>
+              </a:lnSpc>
+              <a:buNone/>
+            </a:pPr>
+            <a:r>
+              <a:rPr lang="en-US" sz="2000" dirty="0">
+                <a:solidFill>
+                  <a:srgbClr val="F2F0EA"/>
+                </a:solidFill>
+                <a:latin typeface="Georgia" pitchFamily="34" charset="0"/>
+                <a:ea typeface="Georgia" pitchFamily="34" charset="-122"/>
+                <a:cs typeface="Georgia" pitchFamily="34" charset="-120"/>
+              </a:rPr>
+              <a:t> D. Fernando morrera sem herdeiro varão. A 6 de dezembro de 1383, o Mestre de Avis matou o conde João Fernandes Andeiro nos paços da rainha. Estava combinado que o pajem do Mestre gritaria pela cidade que o matavam.</a:t>
             </a:r>
             <a:endParaRPr lang="en-US" sz="2000" dirty="0"/>
           </a:p>
